--- a/Foundation_F4/Workshop/F4-W06_Apply_Workshop_L11-L12_A_Video_for_Our_Partner_School.pptx
+++ b/Foundation_F4/Workshop/F4-W06_Apply_Workshop_L11-L12_A_Video_for_Our_Partner_School.pptx
@@ -7436,7 +7436,7 @@
                 <a:latin typeface="Calibri" pitchFamily="34" charset="0"/>
                 <a:cs typeface="Amiri" pitchFamily="2" charset="-78"/>
               </a:rPr>
-              <a:t>Odd numbers come from F4-L11, even numbers from F4-L12. Core: a full sentence from the starter. Develop: add the “more” part. Stretch: link two answers with </a:t>
+              <a:t>Odd numbers come from F4-L11, even numbers from F4-L12. Core: a full sentence from the starter. Develop: add the “more” part. Stretch: link two answers with ‏</a:t>
             </a:r>
             <a:pPr algn="l" indent="0" marL="0">
               <a:buNone/>
@@ -7463,7 +7463,7 @@
                 <a:latin typeface="Calibri" pitchFamily="34" charset="0"/>
                 <a:cs typeface="Amiri" pitchFamily="2" charset="-78"/>
               </a:rPr>
-              <a:t>, </a:t>
+              <a:t>‏, ‏</a:t>
             </a:r>
             <a:pPr algn="l" indent="0" marL="0">
               <a:buNone/>
@@ -7490,7 +7490,7 @@
                 <a:latin typeface="Calibri" pitchFamily="34" charset="0"/>
                 <a:cs typeface="Amiri" pitchFamily="2" charset="-78"/>
               </a:rPr>
-              <a:t> or </a:t>
+              <a:t>‏ or ‏</a:t>
             </a:r>
             <a:pPr algn="l" indent="0" marL="0">
               <a:buNone/>
@@ -7517,7 +7517,7 @@
                 <a:latin typeface="Calibri" pitchFamily="34" charset="0"/>
                 <a:cs typeface="Amiri" pitchFamily="2" charset="-78"/>
               </a:rPr>
-              <a:t>. Swap after each question.</a:t>
+              <a:t>‏. Swap after each question.</a:t>
             </a:r>
             <a:endParaRPr lang="en-US" sz="1100" dirty="0"/>
           </a:p>
@@ -10840,7 +10840,7 @@
                 <a:latin typeface="Calibri" pitchFamily="34" charset="0"/>
                 <a:cs typeface="Amiri" pitchFamily="2" charset="-78"/>
               </a:rPr>
-              <a:t>Add a rule (</a:t>
+              <a:t>Add a rule (‏</a:t>
             </a:r>
             <a:pPr algn="l" indent="0" marL="0">
               <a:buNone/>
@@ -10867,7 +10867,7 @@
                 <a:latin typeface="Calibri" pitchFamily="34" charset="0"/>
                 <a:cs typeface="Amiri" pitchFamily="2" charset="-78"/>
               </a:rPr>
-              <a:t> …) and three connectors.</a:t>
+              <a:t> …‏) and three connectors.</a:t>
             </a:r>
             <a:endParaRPr lang="en-US" sz="1150" dirty="0"/>
           </a:p>
@@ -11004,7 +11004,7 @@
                 <a:latin typeface="Calibri" pitchFamily="34" charset="0"/>
                 <a:cs typeface="Amiri" pitchFamily="2" charset="-78"/>
               </a:rPr>
-              <a:t>Add </a:t>
+              <a:t>Add ‏</a:t>
             </a:r>
             <a:pPr algn="l" indent="0" marL="0">
               <a:buNone/>
@@ -11031,7 +11031,7 @@
                 <a:latin typeface="Calibri" pitchFamily="34" charset="0"/>
                 <a:cs typeface="Amiri" pitchFamily="2" charset="-78"/>
               </a:rPr>
-              <a:t> … and </a:t>
+              <a:t> …‏ and ‏</a:t>
             </a:r>
             <a:pPr algn="l" indent="0" marL="0">
               <a:buNone/>
@@ -11058,7 +11058,7 @@
                 <a:latin typeface="Calibri" pitchFamily="34" charset="0"/>
                 <a:cs typeface="Amiri" pitchFamily="2" charset="-78"/>
               </a:rPr>
-              <a:t> … — speak without notes.</a:t>
+              <a:t> …‏ — speak without notes.</a:t>
             </a:r>
             <a:endParaRPr lang="en-US" sz="1150" dirty="0"/>
           </a:p>
@@ -17494,6 +17494,19 @@
               <a:buNone/>
             </a:pPr>
             <a:r>
+              <a:rPr lang="en-US" sz="1150" b="1" dirty="0">
+                <a:solidFill>
+                  <a:srgbClr val="1B3B6F"/>
+                </a:solidFill>
+                <a:latin typeface="Calibri" pitchFamily="34" charset="0"/>
+                <a:cs typeface="Amiri" pitchFamily="2" charset="-78"/>
+              </a:rPr>
+              <a:t>‏</a:t>
+            </a:r>
+            <a:pPr algn="l" indent="0" marL="0">
+              <a:buNone/>
+            </a:pPr>
+            <a:r>
               <a:rPr lang="ar-SA" altLang="en-US" sz="1500" b="1" dirty="0">
                 <a:solidFill>
                   <a:srgbClr val="1B3B6F"/>
@@ -17515,7 +17528,7 @@
                 <a:latin typeface="Calibri" pitchFamily="34" charset="0"/>
                 <a:cs typeface="Amiri" pitchFamily="2" charset="-78"/>
               </a:rPr>
-              <a:t> + noun in -a.</a:t>
+              <a:t>‏ + noun in -a.</a:t>
             </a:r>
             <a:endParaRPr lang="en-US" sz="1150" dirty="0"/>
           </a:p>
@@ -17726,7 +17739,7 @@
                 <a:latin typeface="Calibri" pitchFamily="34" charset="0"/>
                 <a:cs typeface="Amiri" pitchFamily="2" charset="-78"/>
               </a:rPr>
-              <a:t>Feminine → </a:t>
+              <a:t>Feminine → ‏</a:t>
             </a:r>
             <a:pPr algn="l" indent="0" marL="0">
               <a:buNone/>
@@ -17753,7 +17766,7 @@
                 <a:latin typeface="Calibri" pitchFamily="34" charset="0"/>
                 <a:cs typeface="Amiri" pitchFamily="2" charset="-78"/>
               </a:rPr>
-              <a:t>.</a:t>
+              <a:t>‏.</a:t>
             </a:r>
             <a:endParaRPr lang="en-US" sz="1150" dirty="0"/>
           </a:p>
@@ -20087,7 +20100,7 @@
                 <a:latin typeface="Calibri" pitchFamily="34" charset="0"/>
                 <a:cs typeface="Amiri" pitchFamily="2" charset="-78"/>
               </a:rPr>
-              <a:t>☐  At least one </a:t>
+              <a:t>☐  At least one ‏</a:t>
             </a:r>
             <a:pPr algn="l" indent="0" marL="0">
               <a:buNone/>
@@ -20114,7 +20127,7 @@
                 <a:latin typeface="Calibri" pitchFamily="34" charset="0"/>
                 <a:cs typeface="Amiri" pitchFamily="2" charset="-78"/>
               </a:rPr>
-              <a:t> and one </a:t>
+              <a:t>‏ and one ‏</a:t>
             </a:r>
             <a:pPr algn="l" indent="0" marL="0">
               <a:buNone/>
@@ -20141,7 +20154,7 @@
                 <a:latin typeface="Calibri" pitchFamily="34" charset="0"/>
                 <a:cs typeface="Amiri" pitchFamily="2" charset="-78"/>
               </a:rPr>
-              <a:t> (Develop).</a:t>
+              <a:t>‏ (Develop).</a:t>
             </a:r>
             <a:endParaRPr lang="en-US" sz="1200" dirty="0"/>
           </a:p>
@@ -23689,7 +23702,7 @@
                 <a:latin typeface="Calibri" pitchFamily="34" charset="0"/>
                 <a:cs typeface="Amiri" pitchFamily="2" charset="-78"/>
               </a:rPr>
-              <a:t>get the agreements right (</a:t>
+              <a:t>get the agreements right (‏</a:t>
             </a:r>
             <a:pPr algn="l" indent="0" marL="0">
               <a:buNone/>
@@ -23743,7 +23756,7 @@
                 <a:latin typeface="Calibri" pitchFamily="34" charset="0"/>
                 <a:cs typeface="Amiri" pitchFamily="2" charset="-78"/>
               </a:rPr>
-              <a:t> · times)?</a:t>
+              <a:t>‏ · times)?</a:t>
             </a:r>
             <a:endParaRPr lang="en-US" sz="1100" dirty="0"/>
           </a:p>
@@ -23902,7 +23915,7 @@
                 <a:latin typeface="Calibri" pitchFamily="34" charset="0"/>
                 <a:cs typeface="Amiri" pitchFamily="2" charset="-78"/>
               </a:rPr>
-              <a:t>use linking words (</a:t>
+              <a:t>use linking words (‏</a:t>
             </a:r>
             <a:pPr algn="l" indent="0" marL="0">
               <a:buNone/>
@@ -24010,7 +24023,7 @@
                 <a:latin typeface="Calibri" pitchFamily="34" charset="0"/>
                 <a:cs typeface="Amiri" pitchFamily="2" charset="-78"/>
               </a:rPr>
-              <a:t>)?</a:t>
+              <a:t>‏)?</a:t>
             </a:r>
             <a:endParaRPr lang="en-US" sz="1100" dirty="0"/>
           </a:p>
@@ -27956,7 +27969,7 @@
                 <a:latin typeface="Calibri" pitchFamily="34" charset="0"/>
                 <a:cs typeface="Amiri" pitchFamily="2" charset="-78"/>
               </a:rPr>
-              <a:t>I added reasons (</a:t>
+              <a:t>I added reasons (‏</a:t>
             </a:r>
             <a:pPr algn="l" indent="0" marL="0">
               <a:buNone/>
@@ -27983,7 +27996,7 @@
                 <a:latin typeface="Calibri" pitchFamily="34" charset="0"/>
                 <a:cs typeface="Amiri" pitchFamily="2" charset="-78"/>
               </a:rPr>
-              <a:t>) and extra details without frames.</a:t>
+              <a:t>‏) and extra details without frames.</a:t>
             </a:r>
             <a:endParaRPr lang="en-US" sz="1300" dirty="0"/>
           </a:p>
@@ -32111,7 +32124,7 @@
                 <a:latin typeface="Calibri" pitchFamily="34" charset="0"/>
                 <a:cs typeface="Amiri" pitchFamily="2" charset="-78"/>
               </a:rPr>
-              <a:t>☐  Add a reason (</a:t>
+              <a:t>☐  Add a reason (‏</a:t>
             </a:r>
             <a:pPr algn="l" indent="0" marL="0">
               <a:buNone/>
@@ -32138,7 +32151,7 @@
                 <a:latin typeface="Calibri" pitchFamily="34" charset="0"/>
                 <a:cs typeface="Amiri" pitchFamily="2" charset="-78"/>
               </a:rPr>
-              <a:t>) and an extra detail to every point.</a:t>
+              <a:t>‏) and an extra detail to every point.</a:t>
             </a:r>
             <a:endParaRPr lang="en-US" sz="1300" dirty="0"/>
           </a:p>
@@ -33659,7 +33672,7 @@
                 <a:latin typeface="Calibri" pitchFamily="34" charset="0"/>
                 <a:cs typeface="Amiri" pitchFamily="2" charset="-78"/>
               </a:rPr>
-              <a:t>Join a word from each lesson in one sentence with </a:t>
+              <a:t>Join a word from each lesson in one sentence with ‏</a:t>
             </a:r>
             <a:pPr algn="l" indent="0" marL="0">
               <a:buNone/>
@@ -33686,7 +33699,7 @@
                 <a:latin typeface="Calibri" pitchFamily="34" charset="0"/>
                 <a:cs typeface="Amiri" pitchFamily="2" charset="-78"/>
               </a:rPr>
-              <a:t> or </a:t>
+              <a:t>‏ or ‏</a:t>
             </a:r>
             <a:pPr algn="l" indent="0" marL="0">
               <a:buNone/>
@@ -33713,7 +33726,7 @@
                 <a:latin typeface="Calibri" pitchFamily="34" charset="0"/>
                 <a:cs typeface="Amiri" pitchFamily="2" charset="-78"/>
               </a:rPr>
-              <a:t>.</a:t>
+              <a:t>‏.</a:t>
             </a:r>
             <a:endParaRPr lang="en-US" sz="1150" dirty="0"/>
           </a:p>
